--- a/Graph_Database/Gen_ai/Neo4j_GenAI_Agentic_GraphRAG_Exploration.pptx
+++ b/Graph_Database/Gen_ai/Neo4j_GenAI_Agentic_GraphRAG_Exploration.pptx
@@ -166,7 +166,7 @@
         <p:txBody>
           <a:bodyPr/>
           <a:p>
-            <a:fld id="{2AF6BBA1-355C-41F1-91E7-BD205A754819}" type="slidenum">
+            <a:fld id="{E0623520-96DE-4AD8-83FB-60E9B1275F6C}" type="slidenum">
               <a:t>&lt;#&gt;</a:t>
             </a:fld>
           </a:p>
@@ -249,7 +249,7 @@
         <p:txBody>
           <a:bodyPr/>
           <a:p>
-            <a:fld id="{587CC063-ACF4-4D0B-B559-12E1887F883E}" type="slidenum">
+            <a:fld id="{3BD28C1C-AB33-46E1-B1C2-90E6B39895A5}" type="slidenum">
               <a:t>&lt;#&gt;</a:t>
             </a:fld>
           </a:p>
@@ -332,7 +332,7 @@
         <p:txBody>
           <a:bodyPr/>
           <a:p>
-            <a:fld id="{379715B9-B829-4CB6-8D23-89471DD1D30D}" type="slidenum">
+            <a:fld id="{67507670-0C9E-45E8-8AEC-6B7D3838DD30}" type="slidenum">
               <a:t>&lt;#&gt;</a:t>
             </a:fld>
           </a:p>
@@ -415,7 +415,7 @@
         <p:txBody>
           <a:bodyPr/>
           <a:p>
-            <a:fld id="{BE471889-D028-4E2C-95AD-3413234098B0}" type="slidenum">
+            <a:fld id="{481CBE0B-1FF5-46C1-AFB4-6E6296BFC07F}" type="slidenum">
               <a:t>&lt;#&gt;</a:t>
             </a:fld>
           </a:p>
@@ -498,7 +498,7 @@
         <p:txBody>
           <a:bodyPr/>
           <a:p>
-            <a:fld id="{F26F099A-C697-4C27-9ABC-FDD93B6719F7}" type="slidenum">
+            <a:fld id="{6788B5A6-3CEA-42C2-BE28-3B32F6787AD6}" type="slidenum">
               <a:t>&lt;#&gt;</a:t>
             </a:fld>
           </a:p>
@@ -664,7 +664,7 @@
         <p:txBody>
           <a:bodyPr/>
           <a:p>
-            <a:fld id="{D6F72CEB-D4E3-4E07-A429-57D70BE76C25}" type="slidenum">
+            <a:fld id="{207B9A72-2FE1-45D8-BC96-14922652E72D}" type="slidenum">
               <a:t>&lt;#&gt;</a:t>
             </a:fld>
           </a:p>
@@ -747,7 +747,7 @@
         <p:txBody>
           <a:bodyPr/>
           <a:p>
-            <a:fld id="{38C8536E-D587-4853-8307-11AE8D4D2AA3}" type="slidenum">
+            <a:fld id="{B2BBAD9A-557D-4BEC-836A-93AFC6A4B402}" type="slidenum">
               <a:t>&lt;#&gt;</a:t>
             </a:fld>
           </a:p>
@@ -956,7 +956,7 @@
         <p:txBody>
           <a:bodyPr/>
           <a:p>
-            <a:fld id="{17FFD3CD-8BF9-4CA9-A863-6891D0F3EEED}" type="slidenum">
+            <a:fld id="{D770C4D1-67A1-4003-B9D5-EC49241BAE3C}" type="slidenum">
               <a:t>&lt;#&gt;</a:t>
             </a:fld>
           </a:p>
@@ -1039,7 +1039,7 @@
         <p:txBody>
           <a:bodyPr/>
           <a:p>
-            <a:fld id="{151C640B-CB99-4D17-8C74-FF0DA5043F44}" type="slidenum">
+            <a:fld id="{729DFF03-3DB7-4CC6-B50C-CF754F6D41F8}" type="slidenum">
               <a:t>&lt;#&gt;</a:t>
             </a:fld>
           </a:p>
@@ -1162,7 +1162,7 @@
         <p:txBody>
           <a:bodyPr/>
           <a:p>
-            <a:fld id="{6A7C7782-A936-40F6-871C-767277CEA773}" type="slidenum">
+            <a:fld id="{22EA6437-73C3-40B4-A4B6-8AE98D3C99DA}" type="slidenum">
               <a:t>&lt;#&gt;</a:t>
             </a:fld>
           </a:p>
@@ -1245,7 +1245,7 @@
         <p:txBody>
           <a:bodyPr/>
           <a:p>
-            <a:fld id="{FD1FDDF4-39E6-4140-A116-03B3EB9E16B7}" type="slidenum">
+            <a:fld id="{0E75ED86-E2A4-4CC7-89A9-5132156A08F3}" type="slidenum">
               <a:t>&lt;#&gt;</a:t>
             </a:fld>
           </a:p>
@@ -1412,7 +1412,7 @@
                 </a:solidFill>
                 <a:latin typeface="Calibri"/>
               </a:rPr>
-              <a:t> </a:t>
+              <a:t>&lt;date/time&gt;</a:t>
             </a:r>
             <a:endParaRPr b="0" lang="en-US" sz="1200" spc="-1" strike="noStrike">
               <a:solidFill>
@@ -1472,7 +1472,7 @@
                 </a:solidFill>
                 <a:latin typeface="Times New Roman"/>
               </a:rPr>
-              <a:t> </a:t>
+              <a:t>&lt;footer&gt;</a:t>
             </a:r>
             <a:endParaRPr b="0" lang="en-US" sz="1400" spc="-1" strike="noStrike">
               <a:solidFill>
@@ -1533,7 +1533,7 @@
               </a:lnSpc>
               <a:buNone/>
             </a:pPr>
-            <a:fld id="{FD8420C6-64D4-40C0-B539-B3A28B110D46}" type="slidenum">
+            <a:fld id="{800E9BEE-7DDB-4190-A40B-4B8CC93CAE73}" type="slidenum">
               <a:rPr b="0" lang="en-US" sz="1200" spc="-1" strike="noStrike">
                 <a:solidFill>
                   <a:schemeClr val="dk1">
@@ -1542,7 +1542,7 @@
                 </a:solidFill>
                 <a:latin typeface="Calibri"/>
               </a:rPr>
-              <a:t>11</a:t>
+              <a:t>&lt;number&gt;</a:t>
             </a:fld>
             <a:endParaRPr b="0" lang="en-US" sz="1200" spc="-1" strike="noStrike">
               <a:solidFill>
@@ -2055,7 +2055,7 @@
               </a:lnSpc>
               <a:buNone/>
             </a:pPr>
-            <a:fld id="{11BB6E8A-2D01-4583-80A5-6D1178A12A92}" type="slidenum">
+            <a:fld id="{8E5D4F19-0FBB-4A8E-8B95-12AD576D3186}" type="slidenum">
               <a:rPr b="0" lang="en-US" sz="1200" spc="-1" strike="noStrike">
                 <a:solidFill>
                   <a:schemeClr val="dk1">
@@ -2623,7 +2623,7 @@
               </a:lnSpc>
               <a:buNone/>
             </a:pPr>
-            <a:fld id="{BC5DA8D9-BCEE-4EF9-B66D-D31F7A4606C7}" type="slidenum">
+            <a:fld id="{BA9F8FFE-C5E4-4E6A-9BF8-B373A2A0E69D}" type="slidenum">
               <a:rPr b="0" lang="en-US" sz="1200" spc="-1" strike="noStrike">
                 <a:solidFill>
                   <a:schemeClr val="dk1">
@@ -3087,7 +3087,7 @@
               </a:lnSpc>
               <a:buNone/>
             </a:pPr>
-            <a:fld id="{C0346EA3-1495-405A-BD99-CC1A887D833E}" type="slidenum">
+            <a:fld id="{FCE644A9-E239-468F-A895-07C75B3752B6}" type="slidenum">
               <a:rPr b="0" lang="en-US" sz="1200" spc="-1" strike="noStrike">
                 <a:solidFill>
                   <a:schemeClr val="dk1">
@@ -3551,7 +3551,7 @@
               </a:lnSpc>
               <a:buNone/>
             </a:pPr>
-            <a:fld id="{E3091E38-2F21-4769-B44B-F3CB3F64C6BF}" type="slidenum">
+            <a:fld id="{F8794586-0905-4C86-829E-4BAC932A3636}" type="slidenum">
               <a:rPr b="0" lang="en-US" sz="1200" spc="-1" strike="noStrike">
                 <a:solidFill>
                   <a:schemeClr val="dk1">
@@ -4015,7 +4015,7 @@
               </a:lnSpc>
               <a:buNone/>
             </a:pPr>
-            <a:fld id="{3B7DE5A8-8F60-419E-9C12-FD993B1CBF55}" type="slidenum">
+            <a:fld id="{9C7DEBF7-DFDA-4678-AA59-3BB35ACCDB05}" type="slidenum">
               <a:rPr b="0" lang="en-US" sz="1200" spc="-1" strike="noStrike">
                 <a:solidFill>
                   <a:schemeClr val="dk1">
@@ -4360,7 +4360,7 @@
               </a:lnSpc>
               <a:buNone/>
             </a:pPr>
-            <a:fld id="{87551632-BD90-4EDD-B0CD-8470C85584B8}" type="slidenum">
+            <a:fld id="{E0C6FF83-4463-4E6E-A94A-79FCC2D1B086}" type="slidenum">
               <a:rPr b="0" lang="en-US" sz="1200" spc="-1" strike="noStrike">
                 <a:solidFill>
                   <a:schemeClr val="dk1">
@@ -5003,7 +5003,7 @@
               </a:lnSpc>
               <a:buNone/>
             </a:pPr>
-            <a:fld id="{2FEEFBE7-B6F8-4DE9-BE70-07D1463149A2}" type="slidenum">
+            <a:fld id="{EC903B84-44F0-4082-9BCF-593C1D12ACE4}" type="slidenum">
               <a:rPr b="0" lang="en-US" sz="1200" spc="-1" strike="noStrike">
                 <a:solidFill>
                   <a:schemeClr val="dk1">
@@ -5762,7 +5762,7 @@
               </a:lnSpc>
               <a:buNone/>
             </a:pPr>
-            <a:fld id="{41C4986C-1C69-4763-BD46-B2E5840D0EC8}" type="slidenum">
+            <a:fld id="{7BA20308-7E5F-4A89-B5E2-C5AC482FA44D}" type="slidenum">
               <a:rPr b="0" lang="en-US" sz="1200" spc="-1" strike="noStrike">
                 <a:solidFill>
                   <a:schemeClr val="dk1">
@@ -6047,7 +6047,7 @@
               </a:lnSpc>
               <a:buNone/>
             </a:pPr>
-            <a:fld id="{376EBCE3-E69A-4E12-8BF3-30995ED35B25}" type="slidenum">
+            <a:fld id="{4DDE2D5B-B7A2-46CA-A353-6A7F526B6ADD}" type="slidenum">
               <a:rPr b="0" lang="en-US" sz="1200" spc="-1" strike="noStrike">
                 <a:solidFill>
                   <a:schemeClr val="dk1">
@@ -6505,7 +6505,7 @@
               </a:lnSpc>
               <a:buNone/>
             </a:pPr>
-            <a:fld id="{9E416FB8-198B-4349-9362-E56E97AA8E10}" type="slidenum">
+            <a:fld id="{85A19B04-FE7E-41CD-B5C9-EF776C8F15C6}" type="slidenum">
               <a:rPr b="0" lang="en-US" sz="1200" spc="-1" strike="noStrike">
                 <a:solidFill>
                   <a:schemeClr val="dk1">
